--- a/system-design-101/vi/lessons/sd-01-034/slides/sd-01-034.pptx
+++ b/system-design-101/vi/lessons/sd-01-034/slides/sd-01-034.pptx
@@ -12454,7 +12454,7 @@
               <a:t> từ</a:t>
             </a:r>
             <a:r>
-              <a:rPr lang="en-US" sz="2250" dirty="0" spc="-3" kern="0">
+              <a:rPr lang="en-US" sz="2250" dirty="0" spc="-1" kern="0">
                 <a:solidFill>
                   <a:srgbClr val="C9CDD8"/>
                 </a:solidFill>
@@ -12462,40 +12462,7 @@
                 <a:ea typeface="Be Vietnam Pro" pitchFamily="34" charset="-122"/>
                 <a:cs typeface="Be Vietnam Pro" pitchFamily="34" charset="-120"/>
               </a:rPr>
-              <a:t> khóa,</a:t>
-            </a:r>
-            <a:r>
-              <a:rPr lang="en-US" sz="2250" dirty="0" spc="1" kern="0">
-                <a:solidFill>
-                  <a:srgbClr val="C9CDD8"/>
-                </a:solidFill>
-                <a:latin typeface="Be Vietnam Pro" pitchFamily="34" charset="0"/>
-                <a:ea typeface="Be Vietnam Pro" pitchFamily="34" charset="-122"/>
-                <a:cs typeface="Be Vietnam Pro" pitchFamily="34" charset="-120"/>
-              </a:rPr>
-              <a:t> không</a:t>
-            </a:r>
-            <a:r>
-              <a:rPr lang="en-US" sz="2250" dirty="0" spc="-6" kern="0">
-                <a:solidFill>
-                  <a:srgbClr val="C9CDD8"/>
-                </a:solidFill>
-                <a:latin typeface="Be Vietnam Pro" pitchFamily="34" charset="0"/>
-                <a:ea typeface="Be Vietnam Pro" pitchFamily="34" charset="-122"/>
-                <a:cs typeface="Be Vietnam Pro" pitchFamily="34" charset="-120"/>
-              </a:rPr>
-              <a:t> viết</a:t>
-            </a:r>
-            <a:r>
-              <a:rPr lang="en-US" sz="2250" dirty="0" spc="-17" kern="0">
-                <a:solidFill>
-                  <a:srgbClr val="C9CDD8"/>
-                </a:solidFill>
-                <a:latin typeface="Be Vietnam Pro" pitchFamily="34" charset="0"/>
-                <a:ea typeface="Be Vietnam Pro" pitchFamily="34" charset="-122"/>
-                <a:cs typeface="Be Vietnam Pro" pitchFamily="34" charset="-120"/>
-              </a:rPr>
-              <a:t> tắt.</a:t>
+              <a:t> khóa.</a:t>
             </a:r>
             <a:endParaRPr lang="en-US" sz="2250" dirty="0"/>
           </a:p>

--- a/system-design-101/vi/lessons/sd-01-034/slides/sd-01-034.pptx
+++ b/system-design-101/vi/lessons/sd-01-034/slides/sd-01-034.pptx
@@ -9251,7 +9251,7 @@
         <p:spPr>
           <a:xfrm>
             <a:off x="914400" y="1390650"/>
-            <a:ext cx="12382500" cy="1143000"/>
+            <a:ext cx="12382500" cy="2047875"/>
           </a:xfrm>
           <a:prstGeom prst="rect">
             <a:avLst/>
@@ -9260,17 +9260,17 @@
           <a:ln/>
         </p:spPr>
         <p:txBody>
-          <a:bodyPr wrap="square" lIns="0" tIns="36576" rIns="0" bIns="-36576" rtlCol="0" anchor="t"/>
+          <a:bodyPr wrap="square" lIns="0" tIns="52578" rIns="0" bIns="-52578" rtlCol="0" anchor="t"/>
           <a:lstStyle/>
           <a:p>
             <a:pPr algn="l" indent="0" marL="0">
               <a:lnSpc>
-                <a:spcPts val="5184"/>
+                <a:spcPts val="7452"/>
               </a:lnSpc>
               <a:buNone/>
             </a:pPr>
             <a:r>
-              <a:rPr lang="en-US" sz="4800" dirty="0" spc="-1" kern="0">
+              <a:rPr lang="en-US" sz="6900" dirty="0" spc="4" kern="0">
                 <a:solidFill>
                   <a:srgbClr val="14161C"/>
                 </a:solidFill>
@@ -9281,7 +9281,7 @@
               <a:t>Lần</a:t>
             </a:r>
             <a:r>
-              <a:rPr lang="en-US" sz="4800" dirty="0" spc="-4" kern="0">
+              <a:rPr lang="en-US" sz="6900" dirty="0" spc="2" kern="0">
                 <a:solidFill>
                   <a:srgbClr val="14161C"/>
                 </a:solidFill>
@@ -9289,10 +9289,10 @@
                 <a:ea typeface="Bricolage Grotesque ExtraBold" pitchFamily="34" charset="-122"/>
                 <a:cs typeface="Bricolage Grotesque ExtraBold" pitchFamily="34" charset="-120"/>
               </a:rPr>
-              <a:t> sau báo</a:t>
-            </a:r>
-            <a:r>
-              <a:rPr lang="en-US" sz="4800" dirty="0" spc="-2" kern="0">
+              <a:t> sau</a:t>
+            </a:r>
+            <a:r>
+              <a:rPr lang="en-US" sz="6900" dirty="0" spc="-4" kern="0">
                 <a:solidFill>
                   <a:srgbClr val="14161C"/>
                 </a:solidFill>
@@ -9300,10 +9300,10 @@
                 <a:ea typeface="Bricolage Grotesque ExtraBold" pitchFamily="34" charset="-122"/>
                 <a:cs typeface="Bricolage Grotesque ExtraBold" pitchFamily="34" charset="-120"/>
               </a:rPr>
-              <a:t> không</a:t>
-            </a:r>
-            <a:r>
-              <a:rPr lang="en-US" sz="4800" dirty="0" spc="-14" kern="0">
+              <a:t> báo</a:t>
+            </a:r>
+            <a:r>
+              <a:rPr lang="en-US" sz="6900" dirty="0" spc="0" kern="0">
                 <a:solidFill>
                   <a:srgbClr val="14161C"/>
                 </a:solidFill>
@@ -9311,10 +9311,10 @@
                 <a:ea typeface="Bricolage Grotesque ExtraBold" pitchFamily="34" charset="-122"/>
                 <a:cs typeface="Bricolage Grotesque ExtraBold" pitchFamily="34" charset="-120"/>
               </a:rPr>
-              <a:t> tìm</a:t>
-            </a:r>
-            <a:r>
-              <a:rPr lang="en-US" sz="4800" dirty="0" spc="1" kern="0">
+              <a:t> không</a:t>
+            </a:r>
+            <a:r>
+              <a:rPr lang="en-US" sz="6900" dirty="0" spc="-20" kern="0">
                 <a:solidFill>
                   <a:srgbClr val="14161C"/>
                 </a:solidFill>
@@ -9322,10 +9322,10 @@
                 <a:ea typeface="Bricolage Grotesque ExtraBold" pitchFamily="34" charset="-122"/>
                 <a:cs typeface="Bricolage Grotesque ExtraBold" pitchFamily="34" charset="-120"/>
               </a:rPr>
-              <a:t> thấy:</a:t>
-            </a:r>
-            <a:r>
-              <a:rPr lang="en-US" sz="4800" dirty="0" spc="0" kern="0">
+              <a:t> tìm</a:t>
+            </a:r>
+            <a:r>
+              <a:rPr lang="en-US" sz="6900" dirty="0" spc="1" kern="0">
                 <a:solidFill>
                   <a:srgbClr val="14161C"/>
                 </a:solidFill>
@@ -9333,10 +9333,10 @@
                 <a:ea typeface="Bricolage Grotesque ExtraBold" pitchFamily="34" charset="-122"/>
                 <a:cs typeface="Bricolage Grotesque ExtraBold" pitchFamily="34" charset="-120"/>
               </a:rPr>
-              <a:t> mất</a:t>
-            </a:r>
-            <a:r>
-              <a:rPr lang="en-US" sz="4800" dirty="0" spc="-6" kern="0">
+              <a:t> thấy:</a:t>
+            </a:r>
+            <a:r>
+              <a:rPr lang="en-US" sz="6900" dirty="0" spc="0" kern="0">
                 <a:solidFill>
                   <a:srgbClr val="14161C"/>
                 </a:solidFill>
@@ -9344,9 +9344,20 @@
                 <a:ea typeface="Bricolage Grotesque ExtraBold" pitchFamily="34" charset="-122"/>
                 <a:cs typeface="Bricolage Grotesque ExtraBold" pitchFamily="34" charset="-120"/>
               </a:rPr>
+              <a:t> mất</a:t>
+            </a:r>
+            <a:r>
+              <a:rPr lang="en-US" sz="6900" dirty="0" spc="-10" kern="0">
+                <a:solidFill>
+                  <a:srgbClr val="14161C"/>
+                </a:solidFill>
+                <a:latin typeface="Bricolage Grotesque ExtraBold" pitchFamily="34" charset="0"/>
+                <a:ea typeface="Bricolage Grotesque ExtraBold" pitchFamily="34" charset="-122"/>
+                <a:cs typeface="Bricolage Grotesque ExtraBold" pitchFamily="34" charset="-120"/>
+              </a:rPr>
               <a:t> idempotent?</a:t>
             </a:r>
-            <a:endParaRPr lang="en-US" sz="4800" dirty="0"/>
+            <a:endParaRPr lang="en-US" sz="6900" dirty="0"/>
           </a:p>
         </p:txBody>
       </p:sp>
@@ -9401,7 +9412,7 @@
         </p:nvSpPr>
         <p:spPr>
           <a:xfrm>
-            <a:off x="2190750" y="2857500"/>
+            <a:off x="2190750" y="3524250"/>
             <a:ext cx="3619500" cy="800100"/>
           </a:xfrm>
           <a:prstGeom prst="roundRect">
@@ -9455,7 +9466,7 @@
         </p:nvSpPr>
         <p:spPr>
           <a:xfrm>
-            <a:off x="12477750" y="2857500"/>
+            <a:off x="12477750" y="3524250"/>
             <a:ext cx="3619500" cy="800100"/>
           </a:xfrm>
           <a:prstGeom prst="roundRect">
@@ -9509,8 +9520,8 @@
         </p:nvSpPr>
         <p:spPr>
           <a:xfrm>
-            <a:off x="4000500" y="3657600"/>
-            <a:ext cx="0" cy="4152900"/>
+            <a:off x="4000500" y="4324350"/>
+            <a:ext cx="0" cy="3486150"/>
           </a:xfrm>
           <a:prstGeom prst="line">
             <a:avLst/>
@@ -9534,8 +9545,8 @@
         </p:nvSpPr>
         <p:spPr>
           <a:xfrm>
-            <a:off x="14287500" y="3657600"/>
-            <a:ext cx="0" cy="4152900"/>
+            <a:off x="14287500" y="4324350"/>
+            <a:ext cx="0" cy="3486150"/>
           </a:xfrm>
           <a:prstGeom prst="line">
             <a:avLst/>
@@ -9559,7 +9570,7 @@
         </p:nvSpPr>
         <p:spPr>
           <a:xfrm>
-            <a:off x="4000500" y="4381500"/>
+            <a:off x="4000500" y="5048250"/>
             <a:ext cx="10191750" cy="0"/>
           </a:xfrm>
           <a:prstGeom prst="line">
@@ -9584,7 +9595,7 @@
         </p:nvSpPr>
         <p:spPr>
           <a:xfrm>
-            <a:off x="4381500" y="3857625"/>
+            <a:off x="4381500" y="4524375"/>
             <a:ext cx="9525000" cy="457200"/>
           </a:xfrm>
           <a:prstGeom prst="rect">
@@ -9634,7 +9645,7 @@
         </p:nvSpPr>
         <p:spPr>
           <a:xfrm flipH="1">
-            <a:off x="4095750" y="5238750"/>
+            <a:off x="4095750" y="5905500"/>
             <a:ext cx="10191750" cy="0"/>
           </a:xfrm>
           <a:prstGeom prst="line">
@@ -9659,7 +9670,7 @@
         </p:nvSpPr>
         <p:spPr>
           <a:xfrm>
-            <a:off x="4381500" y="4714875"/>
+            <a:off x="4381500" y="5381625"/>
             <a:ext cx="9525000" cy="457200"/>
           </a:xfrm>
           <a:prstGeom prst="rect">
@@ -9731,7 +9742,7 @@
         </p:nvSpPr>
         <p:spPr>
           <a:xfrm>
-            <a:off x="4000500" y="6191250"/>
+            <a:off x="4000500" y="6858000"/>
             <a:ext cx="10191750" cy="0"/>
           </a:xfrm>
           <a:prstGeom prst="line">
@@ -9756,7 +9767,7 @@
         </p:nvSpPr>
         <p:spPr>
           <a:xfrm>
-            <a:off x="4381500" y="5667375"/>
+            <a:off x="4381500" y="6334125"/>
             <a:ext cx="9525000" cy="457200"/>
           </a:xfrm>
           <a:prstGeom prst="rect">
@@ -9828,7 +9839,7 @@
         </p:nvSpPr>
         <p:spPr>
           <a:xfrm flipH="1">
-            <a:off x="4095750" y="7048500"/>
+            <a:off x="4095750" y="7715250"/>
             <a:ext cx="10191750" cy="0"/>
           </a:xfrm>
           <a:prstGeom prst="line">
@@ -9853,7 +9864,7 @@
         </p:nvSpPr>
         <p:spPr>
           <a:xfrm>
-            <a:off x="4381500" y="6524625"/>
+            <a:off x="4381500" y="7191375"/>
             <a:ext cx="9525000" cy="457200"/>
           </a:xfrm>
           <a:prstGeom prst="rect">

--- a/system-design-101/vi/lessons/sd-01-034/slides/sd-01-034.pptx
+++ b/system-design-101/vi/lessons/sd-01-034/slides/sd-01-034.pptx
@@ -31,12 +31,8 @@
       <p:regular r:id="rId17"/>
     </p:embeddedFont>
     <p:embeddedFont>
-      <p:font typeface="Roboto Mono"/>
-      <p:bold r:id="rId19"/>
-    </p:embeddedFont>
-    <p:embeddedFont>
       <p:font typeface="Be Vietnam Pro SemiBold"/>
-      <p:regular r:id="rId20"/>
+      <p:regular r:id="rId19"/>
     </p:embeddedFont>
   </p:embeddedFontLst>
   <p:defaultTextStyle>
@@ -2319,15 +2315,37 @@
               <a:buNone/>
             </a:pPr>
             <a:r>
-              <a:rPr lang="en-US" sz="3600" b="1" dirty="0" spc="-2" kern="0">
+              <a:rPr lang="en-US" sz="3600" b="1" dirty="0" spc="-4" kern="0">
                 <a:solidFill>
                   <a:srgbClr val="F3EEE3"/>
                 </a:solidFill>
-                <a:latin typeface="Roboto Mono" pitchFamily="34" charset="0"/>
-                <a:ea typeface="Roboto Mono" pitchFamily="34" charset="-122"/>
-                <a:cs typeface="Roboto Mono" pitchFamily="34" charset="-120"/>
-              </a:rPr>
-              <a:t>GET  HEAD  OPTIONS</a:t>
+                <a:latin typeface="Be Vietnam Pro" pitchFamily="34" charset="0"/>
+                <a:ea typeface="Be Vietnam Pro" pitchFamily="34" charset="-122"/>
+                <a:cs typeface="Be Vietnam Pro" pitchFamily="34" charset="-120"/>
+              </a:rPr>
+              <a:t>GET</a:t>
+            </a:r>
+            <a:r>
+              <a:rPr lang="en-US" sz="3600" b="1" dirty="0" spc="2" kern="0">
+                <a:solidFill>
+                  <a:srgbClr val="F3EEE3"/>
+                </a:solidFill>
+                <a:latin typeface="Be Vietnam Pro" pitchFamily="34" charset="0"/>
+                <a:ea typeface="Be Vietnam Pro" pitchFamily="34" charset="-122"/>
+                <a:cs typeface="Be Vietnam Pro" pitchFamily="34" charset="-120"/>
+              </a:rPr>
+              <a:t>  HEAD</a:t>
+            </a:r>
+            <a:r>
+              <a:rPr lang="en-US" sz="3600" b="1" dirty="0" spc="-8" kern="0">
+                <a:solidFill>
+                  <a:srgbClr val="F3EEE3"/>
+                </a:solidFill>
+                <a:latin typeface="Be Vietnam Pro" pitchFamily="34" charset="0"/>
+                <a:ea typeface="Be Vietnam Pro" pitchFamily="34" charset="-122"/>
+                <a:cs typeface="Be Vietnam Pro" pitchFamily="34" charset="-120"/>
+              </a:rPr>
+              <a:t>  OPTIONS</a:t>
             </a:r>
             <a:endParaRPr lang="en-US" sz="3600" dirty="0"/>
           </a:p>
@@ -2457,15 +2475,37 @@
               <a:buNone/>
             </a:pPr>
             <a:r>
+              <a:rPr lang="en-US" sz="3600" b="1" dirty="0" spc="-20" kern="0">
+                <a:solidFill>
+                  <a:srgbClr val="F3EEE3"/>
+                </a:solidFill>
+                <a:latin typeface="Be Vietnam Pro" pitchFamily="34" charset="0"/>
+                <a:ea typeface="Be Vietnam Pro" pitchFamily="34" charset="-122"/>
+                <a:cs typeface="Be Vietnam Pro" pitchFamily="34" charset="-120"/>
+              </a:rPr>
+              <a:t>POST</a:t>
+            </a:r>
+            <a:r>
               <a:rPr lang="en-US" sz="3600" b="1" dirty="0" spc="-2" kern="0">
                 <a:solidFill>
                   <a:srgbClr val="F3EEE3"/>
                 </a:solidFill>
-                <a:latin typeface="Roboto Mono" pitchFamily="34" charset="0"/>
-                <a:ea typeface="Roboto Mono" pitchFamily="34" charset="-122"/>
-                <a:cs typeface="Roboto Mono" pitchFamily="34" charset="-120"/>
-              </a:rPr>
-              <a:t>POST  PUT  PATCH</a:t>
+                <a:latin typeface="Be Vietnam Pro" pitchFamily="34" charset="0"/>
+                <a:ea typeface="Be Vietnam Pro" pitchFamily="34" charset="-122"/>
+                <a:cs typeface="Be Vietnam Pro" pitchFamily="34" charset="-120"/>
+              </a:rPr>
+              <a:t>  PUT</a:t>
+            </a:r>
+            <a:r>
+              <a:rPr lang="en-US" sz="3600" b="1" dirty="0" spc="-116" kern="0">
+                <a:solidFill>
+                  <a:srgbClr val="F3EEE3"/>
+                </a:solidFill>
+                <a:latin typeface="Be Vietnam Pro" pitchFamily="34" charset="0"/>
+                <a:ea typeface="Be Vietnam Pro" pitchFamily="34" charset="-122"/>
+                <a:cs typeface="Be Vietnam Pro" pitchFamily="34" charset="-120"/>
+              </a:rPr>
+              <a:t>  PATCH</a:t>
             </a:r>
             <a:endParaRPr lang="en-US" sz="3600" dirty="0"/>
           </a:p>
@@ -2584,15 +2624,37 @@
               <a:buNone/>
             </a:pPr>
             <a:r>
-              <a:rPr lang="en-US" sz="3600" b="1" dirty="0" spc="-2" kern="0">
+              <a:rPr lang="en-US" sz="3600" b="1" dirty="0" spc="-1" kern="0">
                 <a:solidFill>
                   <a:srgbClr val="F3EEE3"/>
                 </a:solidFill>
-                <a:latin typeface="Roboto Mono" pitchFamily="34" charset="0"/>
-                <a:ea typeface="Roboto Mono" pitchFamily="34" charset="-122"/>
-                <a:cs typeface="Roboto Mono" pitchFamily="34" charset="-120"/>
-              </a:rPr>
-              <a:t>DELETE  CONNECT  TRACE</a:t>
+                <a:latin typeface="Be Vietnam Pro" pitchFamily="34" charset="0"/>
+                <a:ea typeface="Be Vietnam Pro" pitchFamily="34" charset="-122"/>
+                <a:cs typeface="Be Vietnam Pro" pitchFamily="34" charset="-120"/>
+              </a:rPr>
+              <a:t>DELETE</a:t>
+            </a:r>
+            <a:r>
+              <a:rPr lang="en-US" sz="3600" b="1" dirty="0" spc="-24" kern="0">
+                <a:solidFill>
+                  <a:srgbClr val="F3EEE3"/>
+                </a:solidFill>
+                <a:latin typeface="Be Vietnam Pro" pitchFamily="34" charset="0"/>
+                <a:ea typeface="Be Vietnam Pro" pitchFamily="34" charset="-122"/>
+                <a:cs typeface="Be Vietnam Pro" pitchFamily="34" charset="-120"/>
+              </a:rPr>
+              <a:t>  CONNECT</a:t>
+            </a:r>
+            <a:r>
+              <a:rPr lang="en-US" sz="3600" b="1" dirty="0" spc="-17" kern="0">
+                <a:solidFill>
+                  <a:srgbClr val="F3EEE3"/>
+                </a:solidFill>
+                <a:latin typeface="Be Vietnam Pro" pitchFamily="34" charset="0"/>
+                <a:ea typeface="Be Vietnam Pro" pitchFamily="34" charset="-122"/>
+                <a:cs typeface="Be Vietnam Pro" pitchFamily="34" charset="-120"/>
+              </a:rPr>
+              <a:t>  TRACE</a:t>
             </a:r>
             <a:endParaRPr lang="en-US" sz="3600" dirty="0"/>
           </a:p>
@@ -3068,37 +3130,59 @@
               <a:buNone/>
             </a:pPr>
             <a:r>
-              <a:rPr lang="en-US" sz="2850" b="1" dirty="0" spc="-2" kern="0">
+              <a:rPr lang="en-US" sz="2850" b="1" dirty="0" spc="4" kern="0">
                 <a:solidFill>
                   <a:srgbClr val="14161C"/>
                 </a:solidFill>
-                <a:latin typeface="Roboto Mono" pitchFamily="34" charset="0"/>
-                <a:ea typeface="Roboto Mono" pitchFamily="34" charset="-122"/>
-                <a:cs typeface="Roboto Mono" pitchFamily="34" charset="-120"/>
+                <a:latin typeface="Be Vietnam Pro" pitchFamily="34" charset="0"/>
+                <a:ea typeface="Be Vietnam Pro" pitchFamily="34" charset="-122"/>
+                <a:cs typeface="Be Vietnam Pro" pitchFamily="34" charset="-120"/>
               </a:rPr>
               <a:t>GET</a:t>
             </a:r>
             <a:r>
-              <a:rPr lang="en-US" sz="2850" b="1" dirty="0" spc="-3" kern="0">
+              <a:rPr lang="en-US" sz="2850" b="1" dirty="0" spc="0" kern="0">
                 <a:solidFill>
                   <a:srgbClr val="14161C"/>
                 </a:solidFill>
-                <a:latin typeface="Roboto Mono" pitchFamily="34" charset="0"/>
-                <a:ea typeface="Roboto Mono" pitchFamily="34" charset="-122"/>
-                <a:cs typeface="Roboto Mono" pitchFamily="34" charset="-120"/>
+                <a:latin typeface="Be Vietnam Pro" pitchFamily="34" charset="0"/>
+                <a:ea typeface="Be Vietnam Pro" pitchFamily="34" charset="-122"/>
+                <a:cs typeface="Be Vietnam Pro" pitchFamily="34" charset="-120"/>
               </a:rPr>
               <a:t> ·</a:t>
             </a:r>
             <a:r>
-              <a:rPr lang="en-US" sz="2850" b="1" dirty="0" spc="-2" kern="0">
+              <a:rPr lang="en-US" sz="2850" b="1" dirty="0" spc="3" kern="0">
                 <a:solidFill>
                   <a:srgbClr val="14161C"/>
                 </a:solidFill>
-                <a:latin typeface="Roboto Mono" pitchFamily="34" charset="0"/>
-                <a:ea typeface="Roboto Mono" pitchFamily="34" charset="-122"/>
-                <a:cs typeface="Roboto Mono" pitchFamily="34" charset="-120"/>
-              </a:rPr>
-              <a:t> HEAD · OPTIONS</a:t>
+                <a:latin typeface="Be Vietnam Pro" pitchFamily="34" charset="0"/>
+                <a:ea typeface="Be Vietnam Pro" pitchFamily="34" charset="-122"/>
+                <a:cs typeface="Be Vietnam Pro" pitchFamily="34" charset="-120"/>
+              </a:rPr>
+              <a:t> HEAD</a:t>
+            </a:r>
+            <a:r>
+              <a:rPr lang="en-US" sz="2850" b="1" dirty="0" spc="0" kern="0">
+                <a:solidFill>
+                  <a:srgbClr val="14161C"/>
+                </a:solidFill>
+                <a:latin typeface="Be Vietnam Pro" pitchFamily="34" charset="0"/>
+                <a:ea typeface="Be Vietnam Pro" pitchFamily="34" charset="-122"/>
+                <a:cs typeface="Be Vietnam Pro" pitchFamily="34" charset="-120"/>
+              </a:rPr>
+              <a:t> ·</a:t>
+            </a:r>
+            <a:r>
+              <a:rPr lang="en-US" sz="2850" b="1" dirty="0" spc="-6" kern="0">
+                <a:solidFill>
+                  <a:srgbClr val="14161C"/>
+                </a:solidFill>
+                <a:latin typeface="Be Vietnam Pro" pitchFamily="34" charset="0"/>
+                <a:ea typeface="Be Vietnam Pro" pitchFamily="34" charset="-122"/>
+                <a:cs typeface="Be Vietnam Pro" pitchFamily="34" charset="-120"/>
+              </a:rPr>
+              <a:t> OPTIONS</a:t>
             </a:r>
             <a:endParaRPr lang="en-US" sz="2850" dirty="0"/>
           </a:p>
@@ -3223,37 +3307,59 @@
               <a:buNone/>
             </a:pPr>
             <a:r>
-              <a:rPr lang="en-US" sz="2850" b="1" dirty="0" spc="-2" kern="0">
+              <a:rPr lang="en-US" sz="2850" b="1" dirty="0" spc="-15" kern="0">
                 <a:solidFill>
                   <a:srgbClr val="14161C"/>
                 </a:solidFill>
-                <a:latin typeface="Roboto Mono" pitchFamily="34" charset="0"/>
-                <a:ea typeface="Roboto Mono" pitchFamily="34" charset="-122"/>
-                <a:cs typeface="Roboto Mono" pitchFamily="34" charset="-120"/>
+                <a:latin typeface="Be Vietnam Pro" pitchFamily="34" charset="0"/>
+                <a:ea typeface="Be Vietnam Pro" pitchFamily="34" charset="-122"/>
+                <a:cs typeface="Be Vietnam Pro" pitchFamily="34" charset="-120"/>
               </a:rPr>
               <a:t>POST</a:t>
             </a:r>
             <a:r>
-              <a:rPr lang="en-US" sz="2850" b="1" dirty="0" spc="-3" kern="0">
+              <a:rPr lang="en-US" sz="2850" b="1" dirty="0" spc="0" kern="0">
                 <a:solidFill>
                   <a:srgbClr val="14161C"/>
                 </a:solidFill>
-                <a:latin typeface="Roboto Mono" pitchFamily="34" charset="0"/>
-                <a:ea typeface="Roboto Mono" pitchFamily="34" charset="-122"/>
-                <a:cs typeface="Roboto Mono" pitchFamily="34" charset="-120"/>
+                <a:latin typeface="Be Vietnam Pro" pitchFamily="34" charset="0"/>
+                <a:ea typeface="Be Vietnam Pro" pitchFamily="34" charset="-122"/>
+                <a:cs typeface="Be Vietnam Pro" pitchFamily="34" charset="-120"/>
               </a:rPr>
               <a:t> ·</a:t>
             </a:r>
             <a:r>
-              <a:rPr lang="en-US" sz="2850" b="1" dirty="0" spc="-2" kern="0">
+              <a:rPr lang="en-US" sz="2850" b="1" dirty="0" spc="3" kern="0">
                 <a:solidFill>
                   <a:srgbClr val="14161C"/>
                 </a:solidFill>
-                <a:latin typeface="Roboto Mono" pitchFamily="34" charset="0"/>
-                <a:ea typeface="Roboto Mono" pitchFamily="34" charset="-122"/>
-                <a:cs typeface="Roboto Mono" pitchFamily="34" charset="-120"/>
-              </a:rPr>
-              <a:t> PUT · PATCH</a:t>
+                <a:latin typeface="Be Vietnam Pro" pitchFamily="34" charset="0"/>
+                <a:ea typeface="Be Vietnam Pro" pitchFamily="34" charset="-122"/>
+                <a:cs typeface="Be Vietnam Pro" pitchFamily="34" charset="-120"/>
+              </a:rPr>
+              <a:t> PUT</a:t>
+            </a:r>
+            <a:r>
+              <a:rPr lang="en-US" sz="2850" b="1" dirty="0" spc="0" kern="0">
+                <a:solidFill>
+                  <a:srgbClr val="14161C"/>
+                </a:solidFill>
+                <a:latin typeface="Be Vietnam Pro" pitchFamily="34" charset="0"/>
+                <a:ea typeface="Be Vietnam Pro" pitchFamily="34" charset="-122"/>
+                <a:cs typeface="Be Vietnam Pro" pitchFamily="34" charset="-120"/>
+              </a:rPr>
+              <a:t> ·</a:t>
+            </a:r>
+            <a:r>
+              <a:rPr lang="en-US" sz="2850" b="1" dirty="0" spc="-105" kern="0">
+                <a:solidFill>
+                  <a:srgbClr val="14161C"/>
+                </a:solidFill>
+                <a:latin typeface="Be Vietnam Pro" pitchFamily="34" charset="0"/>
+                <a:ea typeface="Be Vietnam Pro" pitchFamily="34" charset="-122"/>
+                <a:cs typeface="Be Vietnam Pro" pitchFamily="34" charset="-120"/>
+              </a:rPr>
+              <a:t> PATCH</a:t>
             </a:r>
             <a:endParaRPr lang="en-US" sz="2850" dirty="0"/>
           </a:p>
@@ -3367,57 +3473,57 @@
               <a:buNone/>
             </a:pPr>
             <a:r>
-              <a:rPr lang="en-US" sz="2850" b="1" dirty="0" spc="-2" kern="0">
+              <a:rPr lang="en-US" sz="2850" b="1" dirty="0" spc="3" kern="0">
                 <a:solidFill>
                   <a:srgbClr val="14161C"/>
                 </a:solidFill>
-                <a:latin typeface="Roboto Mono" pitchFamily="34" charset="0"/>
-                <a:ea typeface="Roboto Mono" pitchFamily="34" charset="-122"/>
-                <a:cs typeface="Roboto Mono" pitchFamily="34" charset="-120"/>
+                <a:latin typeface="Be Vietnam Pro" pitchFamily="34" charset="0"/>
+                <a:ea typeface="Be Vietnam Pro" pitchFamily="34" charset="-122"/>
+                <a:cs typeface="Be Vietnam Pro" pitchFamily="34" charset="-120"/>
               </a:rPr>
               <a:t>DELETE</a:t>
             </a:r>
             <a:r>
-              <a:rPr lang="en-US" sz="2850" b="1" dirty="0" spc="-3" kern="0">
+              <a:rPr lang="en-US" sz="2850" b="1" dirty="0" spc="-1" kern="0">
                 <a:solidFill>
                   <a:srgbClr val="14161C"/>
                 </a:solidFill>
-                <a:latin typeface="Roboto Mono" pitchFamily="34" charset="0"/>
-                <a:ea typeface="Roboto Mono" pitchFamily="34" charset="-122"/>
-                <a:cs typeface="Roboto Mono" pitchFamily="34" charset="-120"/>
+                <a:latin typeface="Be Vietnam Pro" pitchFamily="34" charset="0"/>
+                <a:ea typeface="Be Vietnam Pro" pitchFamily="34" charset="-122"/>
+                <a:cs typeface="Be Vietnam Pro" pitchFamily="34" charset="-120"/>
               </a:rPr>
               <a:t> ·</a:t>
             </a:r>
             <a:r>
-              <a:rPr lang="en-US" sz="2850" b="1" dirty="0" spc="-2" kern="0">
+              <a:rPr lang="en-US" sz="2850" b="1" dirty="0" spc="-20" kern="0">
                 <a:solidFill>
                   <a:srgbClr val="14161C"/>
                 </a:solidFill>
-                <a:latin typeface="Roboto Mono" pitchFamily="34" charset="0"/>
-                <a:ea typeface="Roboto Mono" pitchFamily="34" charset="-122"/>
-                <a:cs typeface="Roboto Mono" pitchFamily="34" charset="-120"/>
+                <a:latin typeface="Be Vietnam Pro" pitchFamily="34" charset="0"/>
+                <a:ea typeface="Be Vietnam Pro" pitchFamily="34" charset="-122"/>
+                <a:cs typeface="Be Vietnam Pro" pitchFamily="34" charset="-120"/>
               </a:rPr>
               <a:t> CONNECT</a:t>
             </a:r>
             <a:r>
-              <a:rPr lang="en-US" sz="2850" b="1" dirty="0" spc="-3" kern="0">
+              <a:rPr lang="en-US" sz="2850" b="1" dirty="0" spc="-1" kern="0">
                 <a:solidFill>
                   <a:srgbClr val="14161C"/>
                 </a:solidFill>
-                <a:latin typeface="Roboto Mono" pitchFamily="34" charset="0"/>
-                <a:ea typeface="Roboto Mono" pitchFamily="34" charset="-122"/>
-                <a:cs typeface="Roboto Mono" pitchFamily="34" charset="-120"/>
+                <a:latin typeface="Be Vietnam Pro" pitchFamily="34" charset="0"/>
+                <a:ea typeface="Be Vietnam Pro" pitchFamily="34" charset="-122"/>
+                <a:cs typeface="Be Vietnam Pro" pitchFamily="34" charset="-120"/>
               </a:rPr>
               <a:t> ·</a:t>
             </a:r>
             <a:r>
-              <a:rPr lang="en-US" sz="2850" b="1" dirty="0" spc="-2" kern="0">
+              <a:rPr lang="en-US" sz="2850" b="1" dirty="0" spc="-13" kern="0">
                 <a:solidFill>
                   <a:srgbClr val="14161C"/>
                 </a:solidFill>
-                <a:latin typeface="Roboto Mono" pitchFamily="34" charset="0"/>
-                <a:ea typeface="Roboto Mono" pitchFamily="34" charset="-122"/>
-                <a:cs typeface="Roboto Mono" pitchFamily="34" charset="-120"/>
+                <a:latin typeface="Be Vietnam Pro" pitchFamily="34" charset="0"/>
+                <a:ea typeface="Be Vietnam Pro" pitchFamily="34" charset="-122"/>
+                <a:cs typeface="Be Vietnam Pro" pitchFamily="34" charset="-120"/>
               </a:rPr>
               <a:t> TRACE</a:t>
             </a:r>
@@ -4410,13 +4516,13 @@
               <a:buNone/>
             </a:pPr>
             <a:r>
-              <a:rPr lang="en-US" sz="3600" b="1" dirty="0" spc="-2" kern="0">
+              <a:rPr lang="en-US" sz="3600" b="1" dirty="0" spc="-4" kern="0">
                 <a:solidFill>
                   <a:srgbClr val="0F766E"/>
                 </a:solidFill>
-                <a:latin typeface="Roboto Mono" pitchFamily="34" charset="0"/>
-                <a:ea typeface="Roboto Mono" pitchFamily="34" charset="-122"/>
-                <a:cs typeface="Roboto Mono" pitchFamily="34" charset="-120"/>
+                <a:latin typeface="Be Vietnam Pro" pitchFamily="34" charset="0"/>
+                <a:ea typeface="Be Vietnam Pro" pitchFamily="34" charset="-122"/>
+                <a:cs typeface="Be Vietnam Pro" pitchFamily="34" charset="-120"/>
               </a:rPr>
               <a:t>GET</a:t>
             </a:r>
@@ -4548,13 +4654,13 @@
               <a:buNone/>
             </a:pPr>
             <a:r>
-              <a:rPr lang="en-US" sz="3600" b="1" dirty="0" spc="-2" kern="0">
+              <a:rPr lang="en-US" sz="3600" b="1" dirty="0" spc="1" kern="0">
                 <a:solidFill>
                   <a:srgbClr val="0F766E"/>
                 </a:solidFill>
-                <a:latin typeface="Roboto Mono" pitchFamily="34" charset="0"/>
-                <a:ea typeface="Roboto Mono" pitchFamily="34" charset="-122"/>
-                <a:cs typeface="Roboto Mono" pitchFamily="34" charset="-120"/>
+                <a:latin typeface="Be Vietnam Pro" pitchFamily="34" charset="0"/>
+                <a:ea typeface="Be Vietnam Pro" pitchFamily="34" charset="-122"/>
+                <a:cs typeface="Be Vietnam Pro" pitchFamily="34" charset="-120"/>
               </a:rPr>
               <a:t>HEAD</a:t>
             </a:r>
@@ -4719,13 +4825,13 @@
               <a:buNone/>
             </a:pPr>
             <a:r>
-              <a:rPr lang="en-US" sz="3600" b="1" dirty="0" spc="-2" kern="0">
+              <a:rPr lang="en-US" sz="3600" b="1" dirty="0" spc="-11" kern="0">
                 <a:solidFill>
                   <a:srgbClr val="0F766E"/>
                 </a:solidFill>
-                <a:latin typeface="Roboto Mono" pitchFamily="34" charset="0"/>
-                <a:ea typeface="Roboto Mono" pitchFamily="34" charset="-122"/>
-                <a:cs typeface="Roboto Mono" pitchFamily="34" charset="-120"/>
+                <a:latin typeface="Be Vietnam Pro" pitchFamily="34" charset="0"/>
+                <a:ea typeface="Be Vietnam Pro" pitchFamily="34" charset="-122"/>
+                <a:cs typeface="Be Vietnam Pro" pitchFamily="34" charset="-120"/>
               </a:rPr>
               <a:t>OPTIONS</a:t>
             </a:r>
@@ -5485,13 +5591,13 @@
               <a:buNone/>
             </a:pPr>
             <a:r>
-              <a:rPr lang="en-US" sz="4800" b="1" dirty="0" spc="5" kern="0">
+              <a:rPr lang="en-US" sz="4800" b="1" dirty="0" spc="-24" kern="0">
                 <a:solidFill>
                   <a:srgbClr val="FF6A4D"/>
                 </a:solidFill>
-                <a:latin typeface="Roboto Mono" pitchFamily="34" charset="0"/>
-                <a:ea typeface="Roboto Mono" pitchFamily="34" charset="-122"/>
-                <a:cs typeface="Roboto Mono" pitchFamily="34" charset="-120"/>
+                <a:latin typeface="Be Vietnam Pro" pitchFamily="34" charset="0"/>
+                <a:ea typeface="Be Vietnam Pro" pitchFamily="34" charset="-122"/>
+                <a:cs typeface="Be Vietnam Pro" pitchFamily="34" charset="-120"/>
               </a:rPr>
               <a:t>POST</a:t>
             </a:r>
@@ -5722,13 +5828,13 @@
               <a:buNone/>
             </a:pPr>
             <a:r>
-              <a:rPr lang="en-US" sz="4800" b="1" dirty="0" spc="5" kern="0">
+              <a:rPr lang="en-US" sz="4800" b="1" dirty="0" spc="2" kern="0">
                 <a:solidFill>
                   <a:srgbClr val="FF6A4D"/>
                 </a:solidFill>
-                <a:latin typeface="Roboto Mono" pitchFamily="34" charset="0"/>
-                <a:ea typeface="Roboto Mono" pitchFamily="34" charset="-122"/>
-                <a:cs typeface="Roboto Mono" pitchFamily="34" charset="-120"/>
+                <a:latin typeface="Be Vietnam Pro" pitchFamily="34" charset="0"/>
+                <a:ea typeface="Be Vietnam Pro" pitchFamily="34" charset="-122"/>
+                <a:cs typeface="Be Vietnam Pro" pitchFamily="34" charset="-120"/>
               </a:rPr>
               <a:t>PUT</a:t>
             </a:r>
@@ -5942,13 +6048,13 @@
               <a:buNone/>
             </a:pPr>
             <a:r>
-              <a:rPr lang="en-US" sz="4800" b="1" dirty="0" spc="5" kern="0">
+              <a:rPr lang="en-US" sz="4800" b="1" dirty="0" spc="-215" kern="0">
                 <a:solidFill>
                   <a:srgbClr val="FF6A4D"/>
                 </a:solidFill>
-                <a:latin typeface="Roboto Mono" pitchFamily="34" charset="0"/>
-                <a:ea typeface="Roboto Mono" pitchFamily="34" charset="-122"/>
-                <a:cs typeface="Roboto Mono" pitchFamily="34" charset="-120"/>
+                <a:latin typeface="Be Vietnam Pro" pitchFamily="34" charset="0"/>
+                <a:ea typeface="Be Vietnam Pro" pitchFamily="34" charset="-122"/>
+                <a:cs typeface="Be Vietnam Pro" pitchFamily="34" charset="-120"/>
               </a:rPr>
               <a:t>PATCH</a:t>
             </a:r>
@@ -6879,13 +6985,13 @@
               <a:buNone/>
             </a:pPr>
             <a:r>
-              <a:rPr lang="en-US" sz="3900" b="1" dirty="0" spc="3" kern="0">
+              <a:rPr lang="en-US" sz="3900" b="1" dirty="0" spc="2" kern="0">
                 <a:solidFill>
                   <a:srgbClr val="1F3FD1"/>
                 </a:solidFill>
-                <a:latin typeface="Roboto Mono" pitchFamily="34" charset="0"/>
-                <a:ea typeface="Roboto Mono" pitchFamily="34" charset="-122"/>
-                <a:cs typeface="Roboto Mono" pitchFamily="34" charset="-120"/>
+                <a:latin typeface="Be Vietnam Pro" pitchFamily="34" charset="0"/>
+                <a:ea typeface="Be Vietnam Pro" pitchFamily="34" charset="-122"/>
+                <a:cs typeface="Be Vietnam Pro" pitchFamily="34" charset="-120"/>
               </a:rPr>
               <a:t>DELETE</a:t>
             </a:r>
@@ -7208,13 +7314,13 @@
               <a:buNone/>
             </a:pPr>
             <a:r>
-              <a:rPr lang="en-US" sz="3900" b="1" dirty="0" spc="3" kern="0">
+              <a:rPr lang="en-US" sz="3900" b="1" dirty="0" spc="-31" kern="0">
                 <a:solidFill>
                   <a:srgbClr val="1F3FD1"/>
                 </a:solidFill>
-                <a:latin typeface="Roboto Mono" pitchFamily="34" charset="0"/>
-                <a:ea typeface="Roboto Mono" pitchFamily="34" charset="-122"/>
-                <a:cs typeface="Roboto Mono" pitchFamily="34" charset="-120"/>
+                <a:latin typeface="Be Vietnam Pro" pitchFamily="34" charset="0"/>
+                <a:ea typeface="Be Vietnam Pro" pitchFamily="34" charset="-122"/>
+                <a:cs typeface="Be Vietnam Pro" pitchFamily="34" charset="-120"/>
               </a:rPr>
               <a:t>CONNECT</a:t>
             </a:r>
@@ -7344,13 +7450,13 @@
               <a:buNone/>
             </a:pPr>
             <a:r>
-              <a:rPr lang="en-US" sz="3900" b="1" dirty="0" spc="3" kern="0">
+              <a:rPr lang="en-US" sz="3900" b="1" dirty="0" spc="-25" kern="0">
                 <a:solidFill>
                   <a:srgbClr val="1F3FD1"/>
                 </a:solidFill>
-                <a:latin typeface="Roboto Mono" pitchFamily="34" charset="0"/>
-                <a:ea typeface="Roboto Mono" pitchFamily="34" charset="-122"/>
-                <a:cs typeface="Roboto Mono" pitchFamily="34" charset="-120"/>
+                <a:latin typeface="Be Vietnam Pro" pitchFamily="34" charset="0"/>
+                <a:ea typeface="Be Vietnam Pro" pitchFamily="34" charset="-122"/>
+                <a:cs typeface="Be Vietnam Pro" pitchFamily="34" charset="-120"/>
               </a:rPr>
               <a:t>TRACE</a:t>
             </a:r>
@@ -8155,57 +8261,57 @@
               <a:buNone/>
             </a:pPr>
             <a:r>
-              <a:rPr lang="en-US" sz="2700" b="1" dirty="0" spc="-5" kern="0">
+              <a:rPr lang="en-US" sz="2700" b="1" dirty="0" spc="-2" kern="0">
                 <a:solidFill>
                   <a:srgbClr val="3DD6A0"/>
                 </a:solidFill>
-                <a:latin typeface="Roboto Mono" pitchFamily="34" charset="0"/>
-                <a:ea typeface="Roboto Mono" pitchFamily="34" charset="-122"/>
-                <a:cs typeface="Roboto Mono" pitchFamily="34" charset="-120"/>
+                <a:latin typeface="Be Vietnam Pro" pitchFamily="34" charset="0"/>
+                <a:ea typeface="Be Vietnam Pro" pitchFamily="34" charset="-122"/>
+                <a:cs typeface="Be Vietnam Pro" pitchFamily="34" charset="-120"/>
               </a:rPr>
               <a:t>GET</a:t>
             </a:r>
             <a:r>
-              <a:rPr lang="en-US" sz="2700" b="1" dirty="0" spc="-4" kern="0">
+              <a:rPr lang="en-US" sz="2700" b="1" dirty="0" spc="-3" kern="0">
                 <a:solidFill>
                   <a:srgbClr val="3DD6A0"/>
                 </a:solidFill>
-                <a:latin typeface="Roboto Mono" pitchFamily="34" charset="0"/>
-                <a:ea typeface="Roboto Mono" pitchFamily="34" charset="-122"/>
-                <a:cs typeface="Roboto Mono" pitchFamily="34" charset="-120"/>
+                <a:latin typeface="Be Vietnam Pro" pitchFamily="34" charset="0"/>
+                <a:ea typeface="Be Vietnam Pro" pitchFamily="34" charset="-122"/>
+                <a:cs typeface="Be Vietnam Pro" pitchFamily="34" charset="-120"/>
               </a:rPr>
               <a:t> ·</a:t>
             </a:r>
             <a:r>
-              <a:rPr lang="en-US" sz="2700" b="1" dirty="0" spc="-5" kern="0">
+              <a:rPr lang="en-US" sz="2700" b="1" dirty="0" spc="-1" kern="0">
                 <a:solidFill>
                   <a:srgbClr val="3DD6A0"/>
                 </a:solidFill>
-                <a:latin typeface="Roboto Mono" pitchFamily="34" charset="0"/>
-                <a:ea typeface="Roboto Mono" pitchFamily="34" charset="-122"/>
-                <a:cs typeface="Roboto Mono" pitchFamily="34" charset="-120"/>
+                <a:latin typeface="Be Vietnam Pro" pitchFamily="34" charset="0"/>
+                <a:ea typeface="Be Vietnam Pro" pitchFamily="34" charset="-122"/>
+                <a:cs typeface="Be Vietnam Pro" pitchFamily="34" charset="-120"/>
               </a:rPr>
               <a:t> HEAD</a:t>
             </a:r>
             <a:r>
-              <a:rPr lang="en-US" sz="2700" b="1" dirty="0" spc="-4" kern="0">
+              <a:rPr lang="en-US" sz="2700" b="1" dirty="0" spc="-2" kern="0">
                 <a:solidFill>
                   <a:srgbClr val="3DD6A0"/>
                 </a:solidFill>
-                <a:latin typeface="Roboto Mono" pitchFamily="34" charset="0"/>
-                <a:ea typeface="Roboto Mono" pitchFamily="34" charset="-122"/>
-                <a:cs typeface="Roboto Mono" pitchFamily="34" charset="-120"/>
+                <a:latin typeface="Be Vietnam Pro" pitchFamily="34" charset="0"/>
+                <a:ea typeface="Be Vietnam Pro" pitchFamily="34" charset="-122"/>
+                <a:cs typeface="Be Vietnam Pro" pitchFamily="34" charset="-120"/>
               </a:rPr>
               <a:t> ·</a:t>
             </a:r>
             <a:r>
-              <a:rPr lang="en-US" sz="2700" b="1" dirty="0" spc="-5" kern="0">
+              <a:rPr lang="en-US" sz="2700" b="1" dirty="0" spc="-8" kern="0">
                 <a:solidFill>
                   <a:srgbClr val="3DD6A0"/>
                 </a:solidFill>
-                <a:latin typeface="Roboto Mono" pitchFamily="34" charset="0"/>
-                <a:ea typeface="Roboto Mono" pitchFamily="34" charset="-122"/>
-                <a:cs typeface="Roboto Mono" pitchFamily="34" charset="-120"/>
+                <a:latin typeface="Be Vietnam Pro" pitchFamily="34" charset="0"/>
+                <a:ea typeface="Be Vietnam Pro" pitchFamily="34" charset="-122"/>
+                <a:cs typeface="Be Vietnam Pro" pitchFamily="34" charset="-120"/>
               </a:rPr>
               <a:t> OPTIONS</a:t>
             </a:r>
@@ -8371,57 +8477,57 @@
               <a:buNone/>
             </a:pPr>
             <a:r>
-              <a:rPr lang="en-US" sz="2700" b="1" dirty="0" spc="-5" kern="0">
+              <a:rPr lang="en-US" sz="2700" b="1" dirty="0" spc="-15" kern="0">
                 <a:solidFill>
                   <a:srgbClr val="FF6A4D"/>
                 </a:solidFill>
-                <a:latin typeface="Roboto Mono" pitchFamily="34" charset="0"/>
-                <a:ea typeface="Roboto Mono" pitchFamily="34" charset="-122"/>
-                <a:cs typeface="Roboto Mono" pitchFamily="34" charset="-120"/>
+                <a:latin typeface="Be Vietnam Pro" pitchFamily="34" charset="0"/>
+                <a:ea typeface="Be Vietnam Pro" pitchFamily="34" charset="-122"/>
+                <a:cs typeface="Be Vietnam Pro" pitchFamily="34" charset="-120"/>
               </a:rPr>
               <a:t>POST</a:t>
             </a:r>
             <a:r>
-              <a:rPr lang="en-US" sz="2700" b="1" dirty="0" spc="-4" kern="0">
+              <a:rPr lang="en-US" sz="2700" b="1" dirty="0" spc="-3" kern="0">
                 <a:solidFill>
                   <a:srgbClr val="FF6A4D"/>
                 </a:solidFill>
-                <a:latin typeface="Roboto Mono" pitchFamily="34" charset="0"/>
-                <a:ea typeface="Roboto Mono" pitchFamily="34" charset="-122"/>
-                <a:cs typeface="Roboto Mono" pitchFamily="34" charset="-120"/>
+                <a:latin typeface="Be Vietnam Pro" pitchFamily="34" charset="0"/>
+                <a:ea typeface="Be Vietnam Pro" pitchFamily="34" charset="-122"/>
+                <a:cs typeface="Be Vietnam Pro" pitchFamily="34" charset="-120"/>
               </a:rPr>
               <a:t> ·</a:t>
             </a:r>
             <a:r>
-              <a:rPr lang="en-US" sz="2700" b="1" dirty="0" spc="-5" kern="0">
+              <a:rPr lang="en-US" sz="2700" b="1" dirty="0" spc="0" kern="0">
                 <a:solidFill>
                   <a:srgbClr val="FF6A4D"/>
                 </a:solidFill>
-                <a:latin typeface="Roboto Mono" pitchFamily="34" charset="0"/>
-                <a:ea typeface="Roboto Mono" pitchFamily="34" charset="-122"/>
-                <a:cs typeface="Roboto Mono" pitchFamily="34" charset="-120"/>
+                <a:latin typeface="Be Vietnam Pro" pitchFamily="34" charset="0"/>
+                <a:ea typeface="Be Vietnam Pro" pitchFamily="34" charset="-122"/>
+                <a:cs typeface="Be Vietnam Pro" pitchFamily="34" charset="-120"/>
               </a:rPr>
               <a:t> PUT</a:t>
             </a:r>
             <a:r>
-              <a:rPr lang="en-US" sz="2700" b="1" dirty="0" spc="-4" kern="0">
+              <a:rPr lang="en-US" sz="2700" b="1" dirty="0" spc="-3" kern="0">
                 <a:solidFill>
                   <a:srgbClr val="FF6A4D"/>
                 </a:solidFill>
-                <a:latin typeface="Roboto Mono" pitchFamily="34" charset="0"/>
-                <a:ea typeface="Roboto Mono" pitchFamily="34" charset="-122"/>
-                <a:cs typeface="Roboto Mono" pitchFamily="34" charset="-120"/>
+                <a:latin typeface="Be Vietnam Pro" pitchFamily="34" charset="0"/>
+                <a:ea typeface="Be Vietnam Pro" pitchFamily="34" charset="-122"/>
+                <a:cs typeface="Be Vietnam Pro" pitchFamily="34" charset="-120"/>
               </a:rPr>
               <a:t> ·</a:t>
             </a:r>
             <a:r>
-              <a:rPr lang="en-US" sz="2700" b="1" dirty="0" spc="-5" kern="0">
+              <a:rPr lang="en-US" sz="2700" b="1" dirty="0" spc="-100" kern="0">
                 <a:solidFill>
                   <a:srgbClr val="FF6A4D"/>
                 </a:solidFill>
-                <a:latin typeface="Roboto Mono" pitchFamily="34" charset="0"/>
-                <a:ea typeface="Roboto Mono" pitchFamily="34" charset="-122"/>
-                <a:cs typeface="Roboto Mono" pitchFamily="34" charset="-120"/>
+                <a:latin typeface="Be Vietnam Pro" pitchFamily="34" charset="0"/>
+                <a:ea typeface="Be Vietnam Pro" pitchFamily="34" charset="-122"/>
+                <a:cs typeface="Be Vietnam Pro" pitchFamily="34" charset="-120"/>
               </a:rPr>
               <a:t> PATCH</a:t>
             </a:r>
@@ -8565,13 +8671,13 @@
               <a:buNone/>
             </a:pPr>
             <a:r>
-              <a:rPr lang="en-US" sz="2700" b="1" dirty="0" spc="-5" kern="0">
+              <a:rPr lang="en-US" sz="2700" b="1" dirty="0" spc="-1" kern="0">
                 <a:solidFill>
                   <a:srgbClr val="7C93FF"/>
                 </a:solidFill>
-                <a:latin typeface="Roboto Mono" pitchFamily="34" charset="0"/>
-                <a:ea typeface="Roboto Mono" pitchFamily="34" charset="-122"/>
-                <a:cs typeface="Roboto Mono" pitchFamily="34" charset="-120"/>
+                <a:latin typeface="Be Vietnam Pro" pitchFamily="34" charset="0"/>
+                <a:ea typeface="Be Vietnam Pro" pitchFamily="34" charset="-122"/>
+                <a:cs typeface="Be Vietnam Pro" pitchFamily="34" charset="-120"/>
               </a:rPr>
               <a:t>DELETE</a:t>
             </a:r>
@@ -8580,42 +8686,42 @@
                 <a:solidFill>
                   <a:srgbClr val="7C93FF"/>
                 </a:solidFill>
-                <a:latin typeface="Roboto Mono" pitchFamily="34" charset="0"/>
-                <a:ea typeface="Roboto Mono" pitchFamily="34" charset="-122"/>
-                <a:cs typeface="Roboto Mono" pitchFamily="34" charset="-120"/>
+                <a:latin typeface="Be Vietnam Pro" pitchFamily="34" charset="0"/>
+                <a:ea typeface="Be Vietnam Pro" pitchFamily="34" charset="-122"/>
+                <a:cs typeface="Be Vietnam Pro" pitchFamily="34" charset="-120"/>
               </a:rPr>
               <a:t> ·</a:t>
             </a:r>
             <a:r>
-              <a:rPr lang="en-US" sz="2700" b="1" dirty="0" spc="-5" kern="0">
+              <a:rPr lang="en-US" sz="2700" b="1" dirty="0" spc="-20" kern="0">
                 <a:solidFill>
                   <a:srgbClr val="7C93FF"/>
                 </a:solidFill>
-                <a:latin typeface="Roboto Mono" pitchFamily="34" charset="0"/>
-                <a:ea typeface="Roboto Mono" pitchFamily="34" charset="-122"/>
-                <a:cs typeface="Roboto Mono" pitchFamily="34" charset="-120"/>
+                <a:latin typeface="Be Vietnam Pro" pitchFamily="34" charset="0"/>
+                <a:ea typeface="Be Vietnam Pro" pitchFamily="34" charset="-122"/>
+                <a:cs typeface="Be Vietnam Pro" pitchFamily="34" charset="-120"/>
               </a:rPr>
               <a:t> CONNECT</a:t>
             </a:r>
             <a:r>
-              <a:rPr lang="en-US" sz="2700" b="1" dirty="0" spc="-4" kern="0">
+              <a:rPr lang="en-US" sz="2700" b="1" dirty="0" spc="-2" kern="0">
                 <a:solidFill>
                   <a:srgbClr val="7C93FF"/>
                 </a:solidFill>
-                <a:latin typeface="Roboto Mono" pitchFamily="34" charset="0"/>
-                <a:ea typeface="Roboto Mono" pitchFamily="34" charset="-122"/>
-                <a:cs typeface="Roboto Mono" pitchFamily="34" charset="-120"/>
+                <a:latin typeface="Be Vietnam Pro" pitchFamily="34" charset="0"/>
+                <a:ea typeface="Be Vietnam Pro" pitchFamily="34" charset="-122"/>
+                <a:cs typeface="Be Vietnam Pro" pitchFamily="34" charset="-120"/>
               </a:rPr>
               <a:t> ·</a:t>
             </a:r>
             <a:r>
-              <a:rPr lang="en-US" sz="2700" b="1" dirty="0" spc="-5" kern="0">
+              <a:rPr lang="en-US" sz="2700" b="1" dirty="0" spc="-15" kern="0">
                 <a:solidFill>
                   <a:srgbClr val="7C93FF"/>
                 </a:solidFill>
-                <a:latin typeface="Roboto Mono" pitchFamily="34" charset="0"/>
-                <a:ea typeface="Roboto Mono" pitchFamily="34" charset="-122"/>
-                <a:cs typeface="Roboto Mono" pitchFamily="34" charset="-120"/>
+                <a:latin typeface="Be Vietnam Pro" pitchFamily="34" charset="0"/>
+                <a:ea typeface="Be Vietnam Pro" pitchFamily="34" charset="-122"/>
+                <a:cs typeface="Be Vietnam Pro" pitchFamily="34" charset="-120"/>
               </a:rPr>
               <a:t> TRACE</a:t>
             </a:r>
@@ -9612,24 +9718,46 @@
               <a:buNone/>
             </a:pPr>
             <a:r>
-              <a:rPr lang="en-US" sz="2400" b="1" dirty="0" spc="3" kern="0">
+              <a:rPr lang="en-US" sz="2400" b="1" dirty="0" spc="-3" kern="0">
                 <a:solidFill>
                   <a:srgbClr val="14161C"/>
                 </a:solidFill>
-                <a:latin typeface="Roboto Mono" pitchFamily="34" charset="0"/>
-                <a:ea typeface="Roboto Mono" pitchFamily="34" charset="-122"/>
-                <a:cs typeface="Roboto Mono" pitchFamily="34" charset="-120"/>
-              </a:rPr>
-              <a:t>1 · DELETE</a:t>
+                <a:latin typeface="Be Vietnam Pro" pitchFamily="34" charset="0"/>
+                <a:ea typeface="Be Vietnam Pro" pitchFamily="34" charset="-122"/>
+                <a:cs typeface="Be Vietnam Pro" pitchFamily="34" charset="-120"/>
+              </a:rPr>
+              <a:t>1</a:t>
+            </a:r>
+            <a:r>
+              <a:rPr lang="en-US" sz="2400" b="1" dirty="0" spc="-2" kern="0">
+                <a:solidFill>
+                  <a:srgbClr val="14161C"/>
+                </a:solidFill>
+                <a:latin typeface="Be Vietnam Pro" pitchFamily="34" charset="0"/>
+                <a:ea typeface="Be Vietnam Pro" pitchFamily="34" charset="-122"/>
+                <a:cs typeface="Be Vietnam Pro" pitchFamily="34" charset="-120"/>
+              </a:rPr>
+              <a:t> ·</a:t>
             </a:r>
             <a:r>
               <a:rPr lang="en-US" sz="2400" b="1" dirty="0" spc="2" kern="0">
                 <a:solidFill>
                   <a:srgbClr val="14161C"/>
                 </a:solidFill>
-                <a:latin typeface="Roboto Mono" pitchFamily="34" charset="0"/>
-                <a:ea typeface="Roboto Mono" pitchFamily="34" charset="-122"/>
-                <a:cs typeface="Roboto Mono" pitchFamily="34" charset="-120"/>
+                <a:latin typeface="Be Vietnam Pro" pitchFamily="34" charset="0"/>
+                <a:ea typeface="Be Vietnam Pro" pitchFamily="34" charset="-122"/>
+                <a:cs typeface="Be Vietnam Pro" pitchFamily="34" charset="-120"/>
+              </a:rPr>
+              <a:t> DELETE</a:t>
+            </a:r>
+            <a:r>
+              <a:rPr lang="en-US" sz="2400" b="1" dirty="0" spc="-12" kern="0">
+                <a:solidFill>
+                  <a:srgbClr val="14161C"/>
+                </a:solidFill>
+                <a:latin typeface="Be Vietnam Pro" pitchFamily="34" charset="0"/>
+                <a:ea typeface="Be Vietnam Pro" pitchFamily="34" charset="-122"/>
+                <a:cs typeface="Be Vietnam Pro" pitchFamily="34" charset="-120"/>
               </a:rPr>
               <a:t> /notes/42</a:t>
             </a:r>
@@ -9784,46 +9912,68 @@
               <a:buNone/>
             </a:pPr>
             <a:r>
-              <a:rPr lang="en-US" sz="2400" b="1" dirty="0" spc="3" kern="0">
+              <a:rPr lang="en-US" sz="2400" b="1" dirty="0" spc="-5" kern="0">
                 <a:solidFill>
                   <a:srgbClr val="14161C"/>
                 </a:solidFill>
-                <a:latin typeface="Roboto Mono" pitchFamily="34" charset="0"/>
-                <a:ea typeface="Roboto Mono" pitchFamily="34" charset="-122"/>
-                <a:cs typeface="Roboto Mono" pitchFamily="34" charset="-120"/>
-              </a:rPr>
-              <a:t>3 · DELETE</a:t>
+                <a:latin typeface="Be Vietnam Pro" pitchFamily="34" charset="0"/>
+                <a:ea typeface="Be Vietnam Pro" pitchFamily="34" charset="-122"/>
+                <a:cs typeface="Be Vietnam Pro" pitchFamily="34" charset="-120"/>
+              </a:rPr>
+              <a:t>3</a:t>
+            </a:r>
+            <a:r>
+              <a:rPr lang="en-US" sz="2400" b="1" dirty="0" spc="-2" kern="0">
+                <a:solidFill>
+                  <a:srgbClr val="14161C"/>
+                </a:solidFill>
+                <a:latin typeface="Be Vietnam Pro" pitchFamily="34" charset="0"/>
+                <a:ea typeface="Be Vietnam Pro" pitchFamily="34" charset="-122"/>
+                <a:cs typeface="Be Vietnam Pro" pitchFamily="34" charset="-120"/>
+              </a:rPr>
+              <a:t> ·</a:t>
             </a:r>
             <a:r>
               <a:rPr lang="en-US" sz="2400" b="1" dirty="0" spc="2" kern="0">
                 <a:solidFill>
                   <a:srgbClr val="14161C"/>
                 </a:solidFill>
-                <a:latin typeface="Roboto Mono" pitchFamily="34" charset="0"/>
-                <a:ea typeface="Roboto Mono" pitchFamily="34" charset="-122"/>
-                <a:cs typeface="Roboto Mono" pitchFamily="34" charset="-120"/>
+                <a:latin typeface="Be Vietnam Pro" pitchFamily="34" charset="0"/>
+                <a:ea typeface="Be Vietnam Pro" pitchFamily="34" charset="-122"/>
+                <a:cs typeface="Be Vietnam Pro" pitchFamily="34" charset="-120"/>
+              </a:rPr>
+              <a:t> DELETE</a:t>
+            </a:r>
+            <a:r>
+              <a:rPr lang="en-US" sz="2400" b="1" dirty="0" spc="-12" kern="0">
+                <a:solidFill>
+                  <a:srgbClr val="14161C"/>
+                </a:solidFill>
+                <a:latin typeface="Be Vietnam Pro" pitchFamily="34" charset="0"/>
+                <a:ea typeface="Be Vietnam Pro" pitchFamily="34" charset="-122"/>
+                <a:cs typeface="Be Vietnam Pro" pitchFamily="34" charset="-120"/>
               </a:rPr>
               <a:t> /notes/42</a:t>
             </a:r>
             <a:r>
-              <a:rPr lang="en-US" sz="2400" b="1" dirty="0" spc="4" kern="0">
+              <a:rPr lang="en-US" sz="2400" b="1" dirty="0" spc="-1" kern="0">
                 <a:solidFill>
                   <a:srgbClr val="14161C"/>
                 </a:solidFill>
-                <a:latin typeface="Roboto Mono" pitchFamily="34" charset="0"/>
-                <a:ea typeface="Roboto Mono" pitchFamily="34" charset="-122"/>
-                <a:cs typeface="Roboto Mono" pitchFamily="34" charset="-120"/>
+                <a:latin typeface="Be Vietnam Pro" pitchFamily="34" charset="0"/>
+                <a:ea typeface="Be Vietnam Pro" pitchFamily="34" charset="-122"/>
+                <a:cs typeface="Be Vietnam Pro" pitchFamily="34" charset="-120"/>
               </a:rPr>
               <a:t> lần</a:t>
             </a:r>
             <a:r>
-              <a:rPr lang="en-US" sz="2400" b="1" dirty="0" spc="3" kern="0">
+              <a:rPr lang="en-US" sz="2400" b="1" dirty="0" spc="15" kern="0">
                 <a:solidFill>
                   <a:srgbClr val="14161C"/>
                 </a:solidFill>
-                <a:latin typeface="Roboto Mono" pitchFamily="34" charset="0"/>
-                <a:ea typeface="Roboto Mono" pitchFamily="34" charset="-122"/>
-                <a:cs typeface="Roboto Mono" pitchFamily="34" charset="-120"/>
+                <a:latin typeface="Be Vietnam Pro" pitchFamily="34" charset="0"/>
+                <a:ea typeface="Be Vietnam Pro" pitchFamily="34" charset="-122"/>
+                <a:cs typeface="Be Vietnam Pro" pitchFamily="34" charset="-120"/>
               </a:rPr>
               <a:t> nữa</a:t>
             </a:r>
@@ -10883,7 +11033,7 @@
           <a:ln/>
         </p:spPr>
         <p:txBody>
-          <a:bodyPr wrap="square" lIns="0" tIns="14641" rIns="0" bIns="-14641" rtlCol="0" anchor="t"/>
+          <a:bodyPr wrap="square" lIns="0" tIns="6667" rIns="0" bIns="-6667" rtlCol="0" anchor="t"/>
           <a:lstStyle/>
           <a:p>
             <a:pPr algn="l" indent="0" marL="0">
@@ -10893,24 +11043,35 @@
               <a:buNone/>
             </a:pPr>
             <a:r>
+              <a:rPr lang="en-US" sz="3000" b="1" dirty="0" spc="-3" kern="0">
+                <a:solidFill>
+                  <a:srgbClr val="14161C"/>
+                </a:solidFill>
+                <a:latin typeface="Be Vietnam Pro" pitchFamily="34" charset="0"/>
+                <a:ea typeface="Be Vietnam Pro" pitchFamily="34" charset="-122"/>
+                <a:cs typeface="Be Vietnam Pro" pitchFamily="34" charset="-120"/>
+              </a:rPr>
+              <a:t>GET</a:t>
+            </a:r>
+            <a:r>
               <a:rPr lang="en-US" sz="3000" b="1" dirty="0" spc="0" kern="0">
                 <a:solidFill>
                   <a:srgbClr val="14161C"/>
                 </a:solidFill>
-                <a:latin typeface="Roboto Mono" pitchFamily="34" charset="0"/>
-                <a:ea typeface="Roboto Mono" pitchFamily="34" charset="-122"/>
-                <a:cs typeface="Roboto Mono" pitchFamily="34" charset="-120"/>
-              </a:rPr>
-              <a:t>GET  HEAD</a:t>
-            </a:r>
-            <a:r>
-              <a:rPr lang="en-US" sz="3000" b="1" dirty="0" spc="1" kern="0">
+                <a:latin typeface="Be Vietnam Pro" pitchFamily="34" charset="0"/>
+                <a:ea typeface="Be Vietnam Pro" pitchFamily="34" charset="-122"/>
+                <a:cs typeface="Be Vietnam Pro" pitchFamily="34" charset="-120"/>
+              </a:rPr>
+              <a:t>  HEAD</a:t>
+            </a:r>
+            <a:r>
+              <a:rPr lang="en-US" sz="3000" b="1" dirty="0" spc="-8" kern="0">
                 <a:solidFill>
                   <a:srgbClr val="14161C"/>
                 </a:solidFill>
-                <a:latin typeface="Roboto Mono" pitchFamily="34" charset="0"/>
-                <a:ea typeface="Roboto Mono" pitchFamily="34" charset="-122"/>
-                <a:cs typeface="Roboto Mono" pitchFamily="34" charset="-120"/>
+                <a:latin typeface="Be Vietnam Pro" pitchFamily="34" charset="0"/>
+                <a:ea typeface="Be Vietnam Pro" pitchFamily="34" charset="-122"/>
+                <a:cs typeface="Be Vietnam Pro" pitchFamily="34" charset="-120"/>
               </a:rPr>
               <a:t>  OPTIONS</a:t>
             </a:r>
@@ -10924,35 +11085,35 @@
               <a:buNone/>
             </a:pPr>
             <a:r>
+              <a:rPr lang="en-US" sz="3000" b="1" dirty="0" spc="-22" kern="0">
+                <a:solidFill>
+                  <a:srgbClr val="14161C"/>
+                </a:solidFill>
+                <a:latin typeface="Be Vietnam Pro" pitchFamily="34" charset="0"/>
+                <a:ea typeface="Be Vietnam Pro" pitchFamily="34" charset="-122"/>
+                <a:cs typeface="Be Vietnam Pro" pitchFamily="34" charset="-120"/>
+              </a:rPr>
+              <a:t>TRACE</a:t>
+            </a:r>
+            <a:r>
               <a:rPr lang="en-US" sz="3000" b="1" dirty="0" spc="0" kern="0">
                 <a:solidFill>
                   <a:srgbClr val="14161C"/>
                 </a:solidFill>
-                <a:latin typeface="Roboto Mono" pitchFamily="34" charset="0"/>
-                <a:ea typeface="Roboto Mono" pitchFamily="34" charset="-122"/>
-                <a:cs typeface="Roboto Mono" pitchFamily="34" charset="-120"/>
-              </a:rPr>
-              <a:t>TRACE</a:t>
+                <a:latin typeface="Be Vietnam Pro" pitchFamily="34" charset="0"/>
+                <a:ea typeface="Be Vietnam Pro" pitchFamily="34" charset="-122"/>
+                <a:cs typeface="Be Vietnam Pro" pitchFamily="34" charset="-120"/>
+              </a:rPr>
+              <a:t>  PUT</a:t>
             </a:r>
             <a:r>
               <a:rPr lang="en-US" sz="3000" b="1" dirty="0" spc="1" kern="0">
                 <a:solidFill>
                   <a:srgbClr val="14161C"/>
                 </a:solidFill>
-                <a:latin typeface="Roboto Mono" pitchFamily="34" charset="0"/>
-                <a:ea typeface="Roboto Mono" pitchFamily="34" charset="-122"/>
-                <a:cs typeface="Roboto Mono" pitchFamily="34" charset="-120"/>
-              </a:rPr>
-              <a:t>  PUT</a:t>
-            </a:r>
-            <a:r>
-              <a:rPr lang="en-US" sz="3000" b="1" dirty="0" spc="0" kern="0">
-                <a:solidFill>
-                  <a:srgbClr val="14161C"/>
-                </a:solidFill>
-                <a:latin typeface="Roboto Mono" pitchFamily="34" charset="0"/>
-                <a:ea typeface="Roboto Mono" pitchFamily="34" charset="-122"/>
-                <a:cs typeface="Roboto Mono" pitchFamily="34" charset="-120"/>
+                <a:latin typeface="Be Vietnam Pro" pitchFamily="34" charset="0"/>
+                <a:ea typeface="Be Vietnam Pro" pitchFamily="34" charset="-122"/>
+                <a:cs typeface="Be Vietnam Pro" pitchFamily="34" charset="-120"/>
               </a:rPr>
               <a:t>  DELETE</a:t>
             </a:r>
@@ -11198,15 +11359,26 @@
               <a:buNone/>
             </a:pPr>
             <a:r>
-              <a:rPr lang="en-US" sz="3000" b="1" dirty="0" kern="0">
+              <a:rPr lang="en-US" sz="3000" b="1" dirty="0" spc="-18" kern="0">
                 <a:solidFill>
                   <a:srgbClr val="14161C"/>
                 </a:solidFill>
-                <a:latin typeface="Roboto Mono" pitchFamily="34" charset="0"/>
-                <a:ea typeface="Roboto Mono" pitchFamily="34" charset="-122"/>
-                <a:cs typeface="Roboto Mono" pitchFamily="34" charset="-120"/>
-              </a:rPr>
-              <a:t>POST  PATCH</a:t>
+                <a:latin typeface="Be Vietnam Pro" pitchFamily="34" charset="0"/>
+                <a:ea typeface="Be Vietnam Pro" pitchFamily="34" charset="-122"/>
+                <a:cs typeface="Be Vietnam Pro" pitchFamily="34" charset="-120"/>
+              </a:rPr>
+              <a:t>POST</a:t>
+            </a:r>
+            <a:r>
+              <a:rPr lang="en-US" sz="3000" b="1" dirty="0" spc="-97" kern="0">
+                <a:solidFill>
+                  <a:srgbClr val="14161C"/>
+                </a:solidFill>
+                <a:latin typeface="Be Vietnam Pro" pitchFamily="34" charset="0"/>
+                <a:ea typeface="Be Vietnam Pro" pitchFamily="34" charset="-122"/>
+                <a:cs typeface="Be Vietnam Pro" pitchFamily="34" charset="-120"/>
+              </a:rPr>
+              <a:t>  PATCH</a:t>
             </a:r>
             <a:endParaRPr lang="en-US" sz="3000" dirty="0"/>
           </a:p>
